--- a/assemblies-and-events/new-year-values-week/downloads/New_Year_Values_Week_Slides.pptx
+++ b/assemblies-and-events/new-year-values-week/downloads/New_Year_Values_Week_Slides.pptx
@@ -3203,11 +3203,11 @@
               </a:spcAft>
             </a:pPr>
             <a:r>
-              <a:rPr sz="4000" b="1" i="0">
+              <a:rPr sz="4000" b="0" i="0">
                 <a:solidFill>
                   <a:srgbClr val="1F6577"/>
                 </a:solidFill>
-                <a:latin typeface="Libre Caslon Display"/>
+                <a:latin typeface="Georgia"/>
               </a:rPr>
               <a:t>The New Year Values Week</a:t>
             </a:r>
@@ -3293,7 +3293,7 @@
                 <a:solidFill>
                   <a:srgbClr val="5C6552"/>
                 </a:solidFill>
-                <a:latin typeface="Karla"/>
+                <a:latin typeface="Calibri"/>
               </a:rPr>
               <a:t>An Assembly and a Week of Form Time</a:t>
             </a:r>
@@ -3335,7 +3335,7 @@
                 <a:solidFill>
                   <a:srgbClr val="8B9179"/>
                 </a:solidFill>
-                <a:latin typeface="Karla"/>
+                <a:latin typeface="Calibri"/>
               </a:rPr>
               <a:t>The first week of the spring term</a:t>
             </a:r>
@@ -3401,7 +3401,7 @@
                 <a:solidFill>
                   <a:srgbClr val="8B9179"/>
                 </a:solidFill>
-                <a:latin typeface="Karla"/>
+                <a:latin typeface="Calibri"/>
               </a:rPr>
               <a:t>The Pastoral Guide</a:t>
             </a:r>
@@ -3443,7 +3443,7 @@
                 <a:solidFill>
                   <a:srgbClr val="8B9179"/>
                 </a:solidFill>
-                <a:latin typeface="Karla"/>
+                <a:latin typeface="Calibri"/>
               </a:rPr>
               <a:t>1 / 17</a:t>
             </a:r>
@@ -3543,11 +3543,11 @@
               </a:spcAft>
             </a:pPr>
             <a:r>
-              <a:rPr sz="2800" b="1" i="0">
+              <a:rPr sz="2800" b="0" i="0">
                 <a:solidFill>
                   <a:srgbClr val="FFFDF7"/>
                 </a:solidFill>
-                <a:latin typeface="Libre Caslon Display"/>
+                <a:latin typeface="Georgia"/>
               </a:rPr>
               <a:t>Start small.</a:t>
             </a:r>
@@ -3565,11 +3565,11 @@
               </a:spcAft>
             </a:pPr>
             <a:r>
-              <a:rPr sz="2800" b="1" i="0">
+              <a:rPr sz="2800" b="0" i="0">
                 <a:solidFill>
                   <a:srgbClr val="FFFDF7"/>
                 </a:solidFill>
-                <a:latin typeface="Libre Caslon Display"/>
+                <a:latin typeface="Georgia"/>
               </a:rPr>
               <a:t>Keep going.</a:t>
             </a:r>
@@ -3655,7 +3655,7 @@
                 <a:solidFill>
                   <a:srgbClr val="B9DBE4"/>
                 </a:solidFill>
-                <a:latin typeface="Karla"/>
+                <a:latin typeface="Calibri"/>
               </a:rPr>
               <a:t>It doesn’t have to be big.</a:t>
             </a:r>
@@ -3674,7 +3674,7 @@
                 <a:solidFill>
                   <a:srgbClr val="B9DBE4"/>
                 </a:solidFill>
-                <a:latin typeface="Karla"/>
+                <a:latin typeface="Calibri"/>
               </a:rPr>
               <a:t>It has to be yours, and small enough to start this week.</a:t>
             </a:r>
@@ -3740,7 +3740,7 @@
                 <a:solidFill>
                   <a:srgbClr val="B9DBE4"/>
                 </a:solidFill>
-                <a:latin typeface="Karla"/>
+                <a:latin typeface="Calibri"/>
               </a:rPr>
               <a:t>The Pastoral Guide</a:t>
             </a:r>
@@ -3782,7 +3782,7 @@
                 <a:solidFill>
                   <a:srgbClr val="B9DBE4"/>
                 </a:solidFill>
-                <a:latin typeface="Karla"/>
+                <a:latin typeface="Calibri"/>
               </a:rPr>
               <a:t>10 / 17</a:t>
             </a:r>
@@ -3906,11 +3906,11 @@
               </a:spcAft>
             </a:pPr>
             <a:r>
-              <a:rPr sz="3200" b="1" i="0">
+              <a:rPr sz="3200" b="0" i="0">
                 <a:solidFill>
                   <a:srgbClr val="1F6577"/>
                 </a:solidFill>
-                <a:latin typeface="Libre Caslon Display"/>
+                <a:latin typeface="Georgia"/>
               </a:rPr>
               <a:t>Start small. Keep going.</a:t>
             </a:r>
@@ -3952,7 +3952,7 @@
                 <a:solidFill>
                   <a:srgbClr val="5C6552"/>
                 </a:solidFill>
-                <a:latin typeface="Karla"/>
+                <a:latin typeface="Calibri"/>
               </a:rPr>
               <a:t>Tomorrow in form time: gratitude. Think of one good thing from last term.</a:t>
             </a:r>
@@ -3994,7 +3994,7 @@
                 <a:solidFill>
                   <a:srgbClr val="8B9179"/>
                 </a:solidFill>
-                <a:latin typeface="Karla"/>
+                <a:latin typeface="Calibri"/>
               </a:rPr>
               <a:t>The New Year Values Week  ·  An Assembly and a Week of Form Time</a:t>
             </a:r>
@@ -4060,7 +4060,7 @@
                 <a:solidFill>
                   <a:srgbClr val="8B9179"/>
                 </a:solidFill>
-                <a:latin typeface="Karla"/>
+                <a:latin typeface="Calibri"/>
               </a:rPr>
               <a:t>The Pastoral Guide</a:t>
             </a:r>
@@ -4102,7 +4102,7 @@
                 <a:solidFill>
                   <a:srgbClr val="8B9179"/>
                 </a:solidFill>
-                <a:latin typeface="Karla"/>
+                <a:latin typeface="Calibri"/>
               </a:rPr>
               <a:t>11 / 17</a:t>
             </a:r>
@@ -4219,7 +4219,7 @@
                 <a:solidFill>
                   <a:srgbClr val="1F6577"/>
                 </a:solidFill>
-                <a:latin typeface="Karla"/>
+                <a:latin typeface="Calibri"/>
               </a:rPr>
               <a:t>FORM TIME  ·  TUESDAY  ·  GRATITUDE</a:t>
             </a:r>
@@ -4257,11 +4257,11 @@
               </a:spcAft>
             </a:pPr>
             <a:r>
-              <a:rPr sz="2600" b="1" i="0">
+              <a:rPr sz="2600" b="0" i="0">
                 <a:solidFill>
                   <a:srgbClr val="2E3436"/>
                 </a:solidFill>
-                <a:latin typeface="Libre Caslon Display"/>
+                <a:latin typeface="Georgia"/>
               </a:rPr>
               <a:t>Start with what you’ve already got</a:t>
             </a:r>
@@ -4303,7 +4303,7 @@
                 <a:solidFill>
                   <a:srgbClr val="5C6552"/>
                 </a:solidFill>
-                <a:latin typeface="Karla"/>
+                <a:latin typeface="Calibri"/>
               </a:rPr>
               <a:t>On your sheet, write three things that went well last term, and one person who helped you.</a:t>
             </a:r>
@@ -4385,11 +4385,11 @@
               </a:spcAft>
             </a:pPr>
             <a:r>
-              <a:rPr sz="1350" b="1" i="0">
+              <a:rPr sz="1350" b="0" i="0">
                 <a:solidFill>
                   <a:srgbClr val="1F6577"/>
                 </a:solidFill>
-                <a:latin typeface="Libre Caslon Display"/>
+                <a:latin typeface="Georgia"/>
               </a:rPr>
               <a:t>For example</a:t>
             </a:r>
@@ -4475,7 +4475,7 @@
                 <a:solidFill>
                   <a:srgbClr val="2E3436"/>
                 </a:solidFill>
-                <a:latin typeface="Karla"/>
+                <a:latin typeface="Calibri"/>
               </a:rPr>
               <a:t>I finally understood equations.</a:t>
             </a:r>
@@ -4561,7 +4561,7 @@
                 <a:solidFill>
                   <a:srgbClr val="2E3436"/>
                 </a:solidFill>
-                <a:latin typeface="Karla"/>
+                <a:latin typeface="Calibri"/>
               </a:rPr>
               <a:t>I got into the football team.</a:t>
             </a:r>
@@ -4647,7 +4647,7 @@
                 <a:solidFill>
                   <a:srgbClr val="2E3436"/>
                 </a:solidFill>
-                <a:latin typeface="Karla"/>
+                <a:latin typeface="Calibri"/>
               </a:rPr>
               <a:t>My nan picked me up every Thursday.</a:t>
             </a:r>
@@ -4729,11 +4729,11 @@
               </a:spcAft>
             </a:pPr>
             <a:r>
-              <a:rPr sz="1350" b="1" i="0">
+              <a:rPr sz="1350" b="0" i="0">
                 <a:solidFill>
                   <a:srgbClr val="1F6577"/>
                 </a:solidFill>
-                <a:latin typeface="Libre Caslon Display"/>
+                <a:latin typeface="Georgia"/>
               </a:rPr>
               <a:t>Why it helps</a:t>
             </a:r>
@@ -4819,7 +4819,7 @@
                 <a:solidFill>
                   <a:srgbClr val="2E3436"/>
                 </a:solidFill>
-                <a:latin typeface="Karla"/>
+                <a:latin typeface="Calibri"/>
               </a:rPr>
               <a:t>For two weeks, 221 students listed what they were grateful for.</a:t>
             </a:r>
@@ -4905,7 +4905,7 @@
                 <a:solidFill>
                   <a:srgbClr val="2E3436"/>
                 </a:solidFill>
-                <a:latin typeface="Karla"/>
+                <a:latin typeface="Calibri"/>
               </a:rPr>
               <a:t>They felt more satisfied with school, and still did three weeks later.</a:t>
             </a:r>
@@ -4947,7 +4947,7 @@
                 <a:solidFill>
                   <a:srgbClr val="1F6577"/>
                 </a:solidFill>
-                <a:latin typeface="Karla"/>
+                <a:latin typeface="Calibri"/>
               </a:rPr>
               <a:t>Small things count. Finishing a book counts.</a:t>
             </a:r>
@@ -4989,7 +4989,7 @@
                 <a:solidFill>
                   <a:srgbClr val="8B9179"/>
                 </a:solidFill>
-                <a:latin typeface="Karla"/>
+                <a:latin typeface="Calibri"/>
               </a:rPr>
               <a:t>Source: Froh, Sefick and Emmons, 2008</a:t>
             </a:r>
@@ -5055,7 +5055,7 @@
                 <a:solidFill>
                   <a:srgbClr val="8B9179"/>
                 </a:solidFill>
-                <a:latin typeface="Karla"/>
+                <a:latin typeface="Calibri"/>
               </a:rPr>
               <a:t>The Pastoral Guide</a:t>
             </a:r>
@@ -5097,7 +5097,7 @@
                 <a:solidFill>
                   <a:srgbClr val="8B9179"/>
                 </a:solidFill>
-                <a:latin typeface="Karla"/>
+                <a:latin typeface="Calibri"/>
               </a:rPr>
               <a:t>12 / 17</a:t>
             </a:r>
@@ -5214,7 +5214,7 @@
                 <a:solidFill>
                   <a:srgbClr val="1F6577"/>
                 </a:solidFill>
-                <a:latin typeface="Karla"/>
+                <a:latin typeface="Calibri"/>
               </a:rPr>
               <a:t>FORM TIME  ·  WEDNESDAY  ·  AMBITION</a:t>
             </a:r>
@@ -5252,11 +5252,11 @@
               </a:spcAft>
             </a:pPr>
             <a:r>
-              <a:rPr sz="2800" b="1" i="0">
+              <a:rPr sz="2800" b="0" i="0">
                 <a:solidFill>
                   <a:srgbClr val="2E3436"/>
                 </a:solidFill>
-                <a:latin typeface="Libre Caslon Display"/>
+                <a:latin typeface="Georgia"/>
               </a:rPr>
               <a:t>One thing to get better at</a:t>
             </a:r>
@@ -5298,7 +5298,7 @@
                 <a:solidFill>
                   <a:srgbClr val="5C6552"/>
                 </a:solidFill>
-                <a:latin typeface="Karla"/>
+                <a:latin typeface="Calibri"/>
               </a:rPr>
               <a:t>Pick one thing to get better at by half term. Then make it smaller, until you could start this week.</a:t>
             </a:r>
@@ -5428,7 +5428,7 @@
                 <a:solidFill>
                   <a:srgbClr val="FFFDF7"/>
                 </a:solidFill>
-                <a:latin typeface="Karla"/>
+                <a:latin typeface="Calibri"/>
               </a:rPr>
               <a:t>1</a:t>
             </a:r>
@@ -5466,11 +5466,11 @@
               </a:spcAft>
             </a:pPr>
             <a:r>
-              <a:rPr sz="1300" b="1" i="0">
+              <a:rPr sz="1300" b="0" i="0">
                 <a:solidFill>
                   <a:srgbClr val="1F6577"/>
                 </a:solidFill>
-                <a:latin typeface="Libre Caslon Display"/>
+                <a:latin typeface="Georgia"/>
               </a:rPr>
               <a:t>Too big: get better at maths.</a:t>
             </a:r>
@@ -5512,7 +5512,7 @@
                 <a:solidFill>
                   <a:srgbClr val="5C6552"/>
                 </a:solidFill>
-                <a:latin typeface="Karla"/>
+                <a:latin typeface="Calibri"/>
               </a:rPr>
               <a:t>It isn’t something you can sit down and do.</a:t>
             </a:r>
@@ -5642,7 +5642,7 @@
                 <a:solidFill>
                   <a:srgbClr val="FFFDF7"/>
                 </a:solidFill>
-                <a:latin typeface="Karla"/>
+                <a:latin typeface="Calibri"/>
               </a:rPr>
               <a:t>2</a:t>
             </a:r>
@@ -5680,11 +5680,11 @@
               </a:spcAft>
             </a:pPr>
             <a:r>
-              <a:rPr sz="1300" b="1" i="0">
+              <a:rPr sz="1300" b="0" i="0">
                 <a:solidFill>
                   <a:srgbClr val="1F6577"/>
                 </a:solidFill>
-                <a:latin typeface="Libre Caslon Display"/>
+                <a:latin typeface="Georgia"/>
               </a:rPr>
               <a:t>Smaller: get better at algebra.</a:t>
             </a:r>
@@ -5726,7 +5726,7 @@
                 <a:solidFill>
                   <a:srgbClr val="5C6552"/>
                 </a:solidFill>
-                <a:latin typeface="Karla"/>
+                <a:latin typeface="Calibri"/>
               </a:rPr>
               <a:t>Closer, but it still doesn’t say what you will actually do.</a:t>
             </a:r>
@@ -5856,7 +5856,7 @@
                 <a:solidFill>
                   <a:srgbClr val="FFFDF7"/>
                 </a:solidFill>
-                <a:latin typeface="Karla"/>
+                <a:latin typeface="Calibri"/>
               </a:rPr>
               <a:t>3</a:t>
             </a:r>
@@ -5894,11 +5894,11 @@
               </a:spcAft>
             </a:pPr>
             <a:r>
-              <a:rPr sz="1300" b="1" i="0">
+              <a:rPr sz="1300" b="0" i="0">
                 <a:solidFill>
                   <a:srgbClr val="1F6577"/>
                 </a:solidFill>
-                <a:latin typeface="Libre Caslon Display"/>
+                <a:latin typeface="Georgia"/>
               </a:rPr>
               <a:t>Small enough: ten algebra questions every Sunday.</a:t>
             </a:r>
@@ -5940,7 +5940,7 @@
                 <a:solidFill>
                   <a:srgbClr val="5C6552"/>
                 </a:solidFill>
-                <a:latin typeface="Karla"/>
+                <a:latin typeface="Calibri"/>
               </a:rPr>
               <a:t>You could start this week, and you would know if you had done it.</a:t>
             </a:r>
@@ -5982,7 +5982,7 @@
                 <a:solidFill>
                   <a:srgbClr val="1F6577"/>
                 </a:solidFill>
-                <a:latin typeface="Karla"/>
+                <a:latin typeface="Calibri"/>
               </a:rPr>
               <a:t>Make it something to do, not something to stop. And keep it about what you do, not how you look.</a:t>
             </a:r>
@@ -6048,7 +6048,7 @@
                 <a:solidFill>
                   <a:srgbClr val="8B9179"/>
                 </a:solidFill>
-                <a:latin typeface="Karla"/>
+                <a:latin typeface="Calibri"/>
               </a:rPr>
               <a:t>The Pastoral Guide</a:t>
             </a:r>
@@ -6090,7 +6090,7 @@
                 <a:solidFill>
                   <a:srgbClr val="8B9179"/>
                 </a:solidFill>
-                <a:latin typeface="Karla"/>
+                <a:latin typeface="Calibri"/>
               </a:rPr>
               <a:t>13 / 17</a:t>
             </a:r>
@@ -6207,7 +6207,7 @@
                 <a:solidFill>
                   <a:srgbClr val="1F6577"/>
                 </a:solidFill>
-                <a:latin typeface="Karla"/>
+                <a:latin typeface="Calibri"/>
               </a:rPr>
               <a:t>FORM TIME  ·  THURSDAY  ·  RESILIENCE</a:t>
             </a:r>
@@ -6245,11 +6245,11 @@
               </a:spcAft>
             </a:pPr>
             <a:r>
-              <a:rPr sz="2800" b="1" i="0">
+              <a:rPr sz="2800" b="0" i="0">
                 <a:solidFill>
                   <a:srgbClr val="2E3436"/>
                 </a:solidFill>
-                <a:latin typeface="Libre Caslon Display"/>
+                <a:latin typeface="Georgia"/>
               </a:rPr>
               <a:t>Plan for when it gets hard</a:t>
             </a:r>
@@ -6291,7 +6291,7 @@
                 <a:solidFill>
                   <a:srgbClr val="5C6552"/>
                 </a:solidFill>
-                <a:latin typeface="Karla"/>
+                <a:latin typeface="Calibri"/>
               </a:rPr>
               <a:t>Write your first step. Then finish the sentence: when this happens, I will do that.</a:t>
             </a:r>
@@ -6373,11 +6373,11 @@
               </a:spcAft>
             </a:pPr>
             <a:r>
-              <a:rPr sz="1350" b="1" i="0">
+              <a:rPr sz="1350" b="0" i="0">
                 <a:solidFill>
                   <a:srgbClr val="1F6577"/>
                 </a:solidFill>
-                <a:latin typeface="Libre Caslon Display"/>
+                <a:latin typeface="Georgia"/>
               </a:rPr>
               <a:t>For example</a:t>
             </a:r>
@@ -6463,7 +6463,7 @@
                 <a:solidFill>
                   <a:srgbClr val="2E3436"/>
                 </a:solidFill>
-                <a:latin typeface="Karla"/>
+                <a:latin typeface="Calibri"/>
               </a:rPr>
               <a:t>When I get home tired and want my phone, I will do the ten questions first.</a:t>
             </a:r>
@@ -6549,7 +6549,7 @@
                 <a:solidFill>
                   <a:srgbClr val="2E3436"/>
                 </a:solidFill>
-                <a:latin typeface="Karla"/>
+                <a:latin typeface="Calibri"/>
               </a:rPr>
               <a:t>When I miss a week, I will start again the next Sunday.</a:t>
             </a:r>
@@ -6631,11 +6631,11 @@
               </a:spcAft>
             </a:pPr>
             <a:r>
-              <a:rPr sz="1350" b="1" i="0">
+              <a:rPr sz="1350" b="0" i="0">
                 <a:solidFill>
                   <a:srgbClr val="1F6577"/>
                 </a:solidFill>
-                <a:latin typeface="Libre Caslon Display"/>
+                <a:latin typeface="Georgia"/>
               </a:rPr>
               <a:t>Ask yourself</a:t>
             </a:r>
@@ -6721,7 +6721,7 @@
                 <a:solidFill>
                   <a:srgbClr val="2E3436"/>
                 </a:solidFill>
-                <a:latin typeface="Karla"/>
+                <a:latin typeface="Calibri"/>
               </a:rPr>
               <a:t>What usually gets in the way?</a:t>
             </a:r>
@@ -6807,7 +6807,7 @@
                 <a:solidFill>
                   <a:srgbClr val="2E3436"/>
                 </a:solidFill>
-                <a:latin typeface="Karla"/>
+                <a:latin typeface="Calibri"/>
               </a:rPr>
               <a:t>When is it most likely to happen?</a:t>
             </a:r>
@@ -6893,7 +6893,7 @@
                 <a:solidFill>
                   <a:srgbClr val="2E3436"/>
                 </a:solidFill>
-                <a:latin typeface="Karla"/>
+                <a:latin typeface="Calibri"/>
               </a:rPr>
               <a:t>What will you do instead?</a:t>
             </a:r>
@@ -6935,7 +6935,7 @@
                 <a:solidFill>
                   <a:srgbClr val="1F6577"/>
                 </a:solidFill>
-                <a:latin typeface="Karla"/>
+                <a:latin typeface="Calibri"/>
               </a:rPr>
               <a:t>This is the if-then plan from Monday’s assembly.</a:t>
             </a:r>
@@ -7001,7 +7001,7 @@
                 <a:solidFill>
                   <a:srgbClr val="8B9179"/>
                 </a:solidFill>
-                <a:latin typeface="Karla"/>
+                <a:latin typeface="Calibri"/>
               </a:rPr>
               <a:t>The Pastoral Guide</a:t>
             </a:r>
@@ -7043,7 +7043,7 @@
                 <a:solidFill>
                   <a:srgbClr val="8B9179"/>
                 </a:solidFill>
-                <a:latin typeface="Karla"/>
+                <a:latin typeface="Calibri"/>
               </a:rPr>
               <a:t>14 / 17</a:t>
             </a:r>
@@ -7160,7 +7160,7 @@
                 <a:solidFill>
                   <a:srgbClr val="1F6577"/>
                 </a:solidFill>
-                <a:latin typeface="Karla"/>
+                <a:latin typeface="Calibri"/>
               </a:rPr>
               <a:t>FORM TIME  ·  FRIDAY  ·  COURAGE</a:t>
             </a:r>
@@ -7198,11 +7198,11 @@
               </a:spcAft>
             </a:pPr>
             <a:r>
-              <a:rPr sz="2800" b="1" i="0">
+              <a:rPr sz="2800" b="0" i="0">
                 <a:solidFill>
                   <a:srgbClr val="2E3436"/>
                 </a:solidFill>
-                <a:latin typeface="Libre Caslon Display"/>
+                <a:latin typeface="Georgia"/>
               </a:rPr>
               <a:t>Take the first step</a:t>
             </a:r>
@@ -7244,7 +7244,7 @@
                 <a:solidFill>
                   <a:srgbClr val="5C6552"/>
                 </a:solidFill>
-                <a:latin typeface="Karla"/>
+                <a:latin typeface="Calibri"/>
               </a:rPr>
               <a:t>Do your first step today, or as soon as you can, and write the date on your sheet.</a:t>
             </a:r>
@@ -7394,11 +7394,11 @@
               </a:spcAft>
             </a:pPr>
             <a:r>
-              <a:rPr sz="1350" b="1" i="0">
+              <a:rPr sz="1350" b="0" i="0">
                 <a:solidFill>
                   <a:srgbClr val="1F6577"/>
                 </a:solidFill>
-                <a:latin typeface="Libre Caslon Display"/>
+                <a:latin typeface="Georgia"/>
               </a:rPr>
               <a:t>Start small</a:t>
             </a:r>
@@ -7440,7 +7440,7 @@
                 <a:solidFill>
                   <a:srgbClr val="5C6552"/>
                 </a:solidFill>
-                <a:latin typeface="Karla"/>
+                <a:latin typeface="Calibri"/>
               </a:rPr>
               <a:t>Five minutes still counts.</a:t>
             </a:r>
@@ -7590,11 +7590,11 @@
               </a:spcAft>
             </a:pPr>
             <a:r>
-              <a:rPr sz="1350" b="1" i="0">
+              <a:rPr sz="1350" b="0" i="0">
                 <a:solidFill>
                   <a:srgbClr val="1F6577"/>
                 </a:solidFill>
-                <a:latin typeface="Libre Caslon Display"/>
+                <a:latin typeface="Georgia"/>
               </a:rPr>
               <a:t>Write the date</a:t>
             </a:r>
@@ -7636,7 +7636,7 @@
                 <a:solidFill>
                   <a:srgbClr val="5C6552"/>
                 </a:solidFill>
-                <a:latin typeface="Karla"/>
+                <a:latin typeface="Calibri"/>
               </a:rPr>
               <a:t>On the front, under Friday.</a:t>
             </a:r>
@@ -7786,11 +7786,11 @@
               </a:spcAft>
             </a:pPr>
             <a:r>
-              <a:rPr sz="1350" b="1" i="0">
+              <a:rPr sz="1350" b="0" i="0">
                 <a:solidFill>
                   <a:srgbClr val="1F6577"/>
                 </a:solidFill>
-                <a:latin typeface="Libre Caslon Display"/>
+                <a:latin typeface="Georgia"/>
               </a:rPr>
               <a:t>Pick a person</a:t>
             </a:r>
@@ -7832,7 +7832,7 @@
                 <a:solidFill>
                   <a:srgbClr val="5C6552"/>
                 </a:solidFill>
-                <a:latin typeface="Karla"/>
+                <a:latin typeface="Calibri"/>
               </a:rPr>
               <a:t>Someone to ask how it’s going.</a:t>
             </a:r>
@@ -7874,7 +7874,7 @@
                 <a:solidFill>
                   <a:srgbClr val="1F6577"/>
                 </a:solidFill>
-                <a:latin typeface="Karla"/>
+                <a:latin typeface="Calibri"/>
               </a:rPr>
               <a:t>Starting something small can feel a bit silly. Do it anyway.</a:t>
             </a:r>
@@ -7940,7 +7940,7 @@
                 <a:solidFill>
                   <a:srgbClr val="8B9179"/>
                 </a:solidFill>
-                <a:latin typeface="Karla"/>
+                <a:latin typeface="Calibri"/>
               </a:rPr>
               <a:t>The Pastoral Guide</a:t>
             </a:r>
@@ -7982,7 +7982,7 @@
                 <a:solidFill>
                   <a:srgbClr val="8B9179"/>
                 </a:solidFill>
-                <a:latin typeface="Karla"/>
+                <a:latin typeface="Calibri"/>
               </a:rPr>
               <a:t>15 / 17</a:t>
             </a:r>
@@ -8099,7 +8099,7 @@
                 <a:solidFill>
                   <a:srgbClr val="1F6577"/>
                 </a:solidFill>
-                <a:latin typeface="Karla"/>
+                <a:latin typeface="Calibri"/>
               </a:rPr>
               <a:t>FORM TIME  ·  EVERY FRIDAY  ·  UNTIL HALF TERM</a:t>
             </a:r>
@@ -8137,11 +8137,11 @@
               </a:spcAft>
             </a:pPr>
             <a:r>
-              <a:rPr sz="2800" b="1" i="0">
+              <a:rPr sz="2800" b="0" i="0">
                 <a:solidFill>
                   <a:srgbClr val="2E3436"/>
                 </a:solidFill>
-                <a:latin typeface="Libre Caslon Display"/>
+                <a:latin typeface="Georgia"/>
               </a:rPr>
               <a:t>Friday check-in</a:t>
             </a:r>
@@ -8183,7 +8183,7 @@
                 <a:solidFill>
                   <a:srgbClr val="5C6552"/>
                 </a:solidFill>
-                <a:latin typeface="Karla"/>
+                <a:latin typeface="Calibri"/>
               </a:rPr>
               <a:t>On the back of your sheet, write one line: what did you actually do this week?</a:t>
             </a:r>
@@ -8313,7 +8313,7 @@
                 <a:solidFill>
                   <a:srgbClr val="FFFDF7"/>
                 </a:solidFill>
-                <a:latin typeface="Karla"/>
+                <a:latin typeface="Calibri"/>
               </a:rPr>
               <a:t>1</a:t>
             </a:r>
@@ -8351,11 +8351,11 @@
               </a:spcAft>
             </a:pPr>
             <a:r>
-              <a:rPr sz="1300" b="1" i="0">
+              <a:rPr sz="1300" b="0" i="0">
                 <a:solidFill>
                   <a:srgbClr val="1F6577"/>
                 </a:solidFill>
-                <a:latin typeface="Libre Caslon Display"/>
+                <a:latin typeface="Georgia"/>
               </a:rPr>
               <a:t>Write what you did, not what you meant to do.</a:t>
             </a:r>
@@ -8397,7 +8397,7 @@
                 <a:solidFill>
                   <a:srgbClr val="5C6552"/>
                 </a:solidFill>
-                <a:latin typeface="Karla"/>
+                <a:latin typeface="Calibri"/>
               </a:rPr>
               <a:t>Ten questions on Sunday is evidence. “I’ll try harder” is not.</a:t>
             </a:r>
@@ -8527,7 +8527,7 @@
                 <a:solidFill>
                   <a:srgbClr val="FFFDF7"/>
                 </a:solidFill>
-                <a:latin typeface="Karla"/>
+                <a:latin typeface="Calibri"/>
               </a:rPr>
               <a:t>2</a:t>
             </a:r>
@@ -8565,11 +8565,11 @@
               </a:spcAft>
             </a:pPr>
             <a:r>
-              <a:rPr sz="1300" b="1" i="0">
+              <a:rPr sz="1300" b="0" i="0">
                 <a:solidFill>
                   <a:srgbClr val="1F6577"/>
                 </a:solidFill>
-                <a:latin typeface="Libre Caslon Display"/>
+                <a:latin typeface="Georgia"/>
               </a:rPr>
               <a:t>A blank week is not a fail.</a:t>
             </a:r>
@@ -8611,7 +8611,7 @@
                 <a:solidFill>
                   <a:srgbClr val="5C6552"/>
                 </a:solidFill>
-                <a:latin typeface="Karla"/>
+                <a:latin typeface="Calibri"/>
               </a:rPr>
               <a:t>Write what you will do next week instead.</a:t>
             </a:r>
@@ -8741,7 +8741,7 @@
                 <a:solidFill>
                   <a:srgbClr val="FFFDF7"/>
                 </a:solidFill>
-                <a:latin typeface="Karla"/>
+                <a:latin typeface="Calibri"/>
               </a:rPr>
               <a:t>3</a:t>
             </a:r>
@@ -8779,11 +8779,11 @@
               </a:spcAft>
             </a:pPr>
             <a:r>
-              <a:rPr sz="1300" b="1" i="0">
+              <a:rPr sz="1300" b="0" i="0">
                 <a:solidFill>
                   <a:srgbClr val="1F6577"/>
                 </a:solidFill>
-                <a:latin typeface="Libre Caslon Display"/>
+                <a:latin typeface="Georgia"/>
               </a:rPr>
               <a:t>If your goal was too big, make it smaller.</a:t>
             </a:r>
@@ -8825,7 +8825,7 @@
                 <a:solidFill>
                   <a:srgbClr val="5C6552"/>
                 </a:solidFill>
-                <a:latin typeface="Karla"/>
+                <a:latin typeface="Calibri"/>
               </a:rPr>
               <a:t>That is not giving up. That counts as progress.</a:t>
             </a:r>
@@ -8867,7 +8867,7 @@
                 <a:solidFill>
                   <a:srgbClr val="1F6577"/>
                 </a:solidFill>
-                <a:latin typeface="Karla"/>
+                <a:latin typeface="Calibri"/>
               </a:rPr>
               <a:t>Two minutes, every Friday.</a:t>
             </a:r>
@@ -8933,7 +8933,7 @@
                 <a:solidFill>
                   <a:srgbClr val="8B9179"/>
                 </a:solidFill>
-                <a:latin typeface="Karla"/>
+                <a:latin typeface="Calibri"/>
               </a:rPr>
               <a:t>The Pastoral Guide</a:t>
             </a:r>
@@ -8975,7 +8975,7 @@
                 <a:solidFill>
                   <a:srgbClr val="8B9179"/>
                 </a:solidFill>
-                <a:latin typeface="Karla"/>
+                <a:latin typeface="Calibri"/>
               </a:rPr>
               <a:t>16 / 17</a:t>
             </a:r>
@@ -9092,7 +9092,7 @@
                 <a:solidFill>
                   <a:srgbClr val="1F6577"/>
                 </a:solidFill>
-                <a:latin typeface="Karla"/>
+                <a:latin typeface="Calibri"/>
               </a:rPr>
               <a:t>FORM TIME  ·  LAST FRIDAY  ·  BEFORE HALF TERM</a:t>
             </a:r>
@@ -9130,11 +9130,11 @@
               </a:spcAft>
             </a:pPr>
             <a:r>
-              <a:rPr sz="2800" b="1" i="0">
+              <a:rPr sz="2800" b="0" i="0">
                 <a:solidFill>
                   <a:srgbClr val="2E3436"/>
                 </a:solidFill>
-                <a:latin typeface="Libre Caslon Display"/>
+                <a:latin typeface="Georgia"/>
               </a:rPr>
               <a:t>Look back</a:t>
             </a:r>
@@ -9176,7 +9176,7 @@
                 <a:solidFill>
                   <a:srgbClr val="5C6552"/>
                 </a:solidFill>
-                <a:latin typeface="Karla"/>
+                <a:latin typeface="Calibri"/>
               </a:rPr>
               <a:t>Read your sheet from the beginning, then answer the three questions at the bottom of the back.</a:t>
             </a:r>
@@ -9326,11 +9326,11 @@
               </a:spcAft>
             </a:pPr>
             <a:r>
-              <a:rPr sz="1350" b="1" i="0">
+              <a:rPr sz="1350" b="0" i="0">
                 <a:solidFill>
                   <a:srgbClr val="1F6577"/>
                 </a:solidFill>
-                <a:latin typeface="Libre Caslon Display"/>
+                <a:latin typeface="Georgia"/>
               </a:rPr>
               <a:t>What did you do?</a:t>
             </a:r>
@@ -9372,7 +9372,7 @@
                 <a:solidFill>
                   <a:srgbClr val="5C6552"/>
                 </a:solidFill>
-                <a:latin typeface="Karla"/>
+                <a:latin typeface="Calibri"/>
               </a:rPr>
               <a:t>Count the weeks with a line.</a:t>
             </a:r>
@@ -9522,11 +9522,11 @@
               </a:spcAft>
             </a:pPr>
             <a:r>
-              <a:rPr sz="1350" b="1" i="0">
+              <a:rPr sz="1350" b="0" i="0">
                 <a:solidFill>
                   <a:srgbClr val="1F6577"/>
                 </a:solidFill>
-                <a:latin typeface="Libre Caslon Display"/>
+                <a:latin typeface="Georgia"/>
               </a:rPr>
               <a:t>What helped?</a:t>
             </a:r>
@@ -9568,7 +9568,7 @@
                 <a:solidFill>
                   <a:srgbClr val="5C6552"/>
                 </a:solidFill>
-                <a:latin typeface="Karla"/>
+                <a:latin typeface="Calibri"/>
               </a:rPr>
               <a:t>And what got in the way?</a:t>
             </a:r>
@@ -9718,11 +9718,11 @@
               </a:spcAft>
             </a:pPr>
             <a:r>
-              <a:rPr sz="1350" b="1" i="0">
+              <a:rPr sz="1350" b="0" i="0">
                 <a:solidFill>
                   <a:srgbClr val="1F6577"/>
                 </a:solidFill>
-                <a:latin typeface="Libre Caslon Display"/>
+                <a:latin typeface="Georgia"/>
               </a:rPr>
               <a:t>What will you keep?</a:t>
             </a:r>
@@ -9764,7 +9764,7 @@
                 <a:solidFill>
                   <a:srgbClr val="5C6552"/>
                 </a:solidFill>
-                <a:latin typeface="Karla"/>
+                <a:latin typeface="Calibri"/>
               </a:rPr>
               <a:t>One thing to carry on.</a:t>
             </a:r>
@@ -9806,7 +9806,7 @@
                 <a:solidFill>
                   <a:srgbClr val="1F6577"/>
                 </a:solidFill>
-                <a:latin typeface="Karla"/>
+                <a:latin typeface="Calibri"/>
               </a:rPr>
               <a:t>Start small. Keep going.</a:t>
             </a:r>
@@ -9872,7 +9872,7 @@
                 <a:solidFill>
                   <a:srgbClr val="8B9179"/>
                 </a:solidFill>
-                <a:latin typeface="Karla"/>
+                <a:latin typeface="Calibri"/>
               </a:rPr>
               <a:t>The Pastoral Guide</a:t>
             </a:r>
@@ -9914,7 +9914,7 @@
                 <a:solidFill>
                   <a:srgbClr val="8B9179"/>
                 </a:solidFill>
-                <a:latin typeface="Karla"/>
+                <a:latin typeface="Calibri"/>
               </a:rPr>
               <a:t>17 / 17</a:t>
             </a:r>
@@ -10014,11 +10014,11 @@
               </a:spcAft>
             </a:pPr>
             <a:r>
-              <a:rPr sz="2800" b="1" i="0">
+              <a:rPr sz="2800" b="0" i="0">
                 <a:solidFill>
                   <a:srgbClr val="FFFDF7"/>
                 </a:solidFill>
-                <a:latin typeface="Libre Caslon Display"/>
+                <a:latin typeface="Georgia"/>
               </a:rPr>
               <a:t>Hands up if you have ever made</a:t>
             </a:r>
@@ -10036,11 +10036,11 @@
               </a:spcAft>
             </a:pPr>
             <a:r>
-              <a:rPr sz="2800" b="1" i="0">
+              <a:rPr sz="2800" b="0" i="0">
                 <a:solidFill>
                   <a:srgbClr val="FFFDF7"/>
                 </a:solidFill>
-                <a:latin typeface="Libre Caslon Display"/>
+                <a:latin typeface="Georgia"/>
               </a:rPr>
               <a:t>a New Year’s resolution.</a:t>
             </a:r>
@@ -10126,7 +10126,7 @@
                 <a:solidFill>
                   <a:srgbClr val="B9DBE4"/>
                 </a:solidFill>
-                <a:latin typeface="Karla"/>
+                <a:latin typeface="Calibri"/>
               </a:rPr>
               <a:t>Keep your hand up if it lasted until February. This week is about goals that do.</a:t>
             </a:r>
@@ -10192,7 +10192,7 @@
                 <a:solidFill>
                   <a:srgbClr val="B9DBE4"/>
                 </a:solidFill>
-                <a:latin typeface="Karla"/>
+                <a:latin typeface="Calibri"/>
               </a:rPr>
               <a:t>The Pastoral Guide</a:t>
             </a:r>
@@ -10234,7 +10234,7 @@
                 <a:solidFill>
                   <a:srgbClr val="B9DBE4"/>
                 </a:solidFill>
-                <a:latin typeface="Karla"/>
+                <a:latin typeface="Calibri"/>
               </a:rPr>
               <a:t>2 / 17</a:t>
             </a:r>
@@ -10338,7 +10338,7 @@
                 <a:solidFill>
                   <a:srgbClr val="1F6577"/>
                 </a:solidFill>
-                <a:latin typeface="Karla"/>
+                <a:latin typeface="Calibri"/>
               </a:rPr>
               <a:t>THIS WEEK</a:t>
             </a:r>
@@ -10376,11 +10376,11 @@
               </a:spcAft>
             </a:pPr>
             <a:r>
-              <a:rPr sz="3200" b="1" i="0">
+              <a:rPr sz="3200" b="0" i="0">
                 <a:solidFill>
                   <a:srgbClr val="2E3436"/>
                 </a:solidFill>
-                <a:latin typeface="Libre Caslon Display"/>
+                <a:latin typeface="Georgia"/>
               </a:rPr>
               <a:t>Not a new you</a:t>
             </a:r>
@@ -10422,7 +10422,7 @@
                 <a:solidFill>
                   <a:srgbClr val="5C6552"/>
                 </a:solidFill>
-                <a:latin typeface="Karla"/>
+                <a:latin typeface="Calibri"/>
               </a:rPr>
               <a:t>This week is not about becoming somebody else. It is about four values that help you get a little better at one thing.</a:t>
             </a:r>
@@ -10554,7 +10554,7 @@
                 <a:solidFill>
                   <a:srgbClr val="2E3436"/>
                 </a:solidFill>
-                <a:latin typeface="Karla"/>
+                <a:latin typeface="Calibri"/>
               </a:rPr>
               <a:t>This morning: what research says about goals that last.</a:t>
             </a:r>
@@ -10576,7 +10576,7 @@
                 <a:solidFill>
                   <a:srgbClr val="2E3436"/>
                 </a:solidFill>
-                <a:latin typeface="Karla"/>
+                <a:latin typeface="Calibri"/>
               </a:rPr>
               <a:t>This week: five minutes each morning, and one sheet to keep.</a:t>
             </a:r>
@@ -10642,7 +10642,7 @@
                 <a:solidFill>
                   <a:srgbClr val="8B9179"/>
                 </a:solidFill>
-                <a:latin typeface="Karla"/>
+                <a:latin typeface="Calibri"/>
               </a:rPr>
               <a:t>The Pastoral Guide</a:t>
             </a:r>
@@ -10684,7 +10684,7 @@
                 <a:solidFill>
                   <a:srgbClr val="8B9179"/>
                 </a:solidFill>
-                <a:latin typeface="Karla"/>
+                <a:latin typeface="Calibri"/>
               </a:rPr>
               <a:t>3 / 17</a:t>
             </a:r>
@@ -10788,7 +10788,7 @@
                 <a:solidFill>
                   <a:srgbClr val="1F6577"/>
                 </a:solidFill>
-                <a:latin typeface="Karla"/>
+                <a:latin typeface="Calibri"/>
               </a:rPr>
               <a:t>WHAT THE RESEARCH FOUND</a:t>
             </a:r>
@@ -10826,11 +10826,11 @@
               </a:spcAft>
             </a:pPr>
             <a:r>
-              <a:rPr sz="2800" b="1" i="0">
+              <a:rPr sz="2800" b="0" i="0">
                 <a:solidFill>
                   <a:srgbClr val="2E3436"/>
                 </a:solidFill>
-                <a:latin typeface="Libre Caslon Display"/>
+                <a:latin typeface="Georgia"/>
               </a:rPr>
               <a:t>A fresh start really does help</a:t>
             </a:r>
@@ -10872,7 +10872,7 @@
                 <a:solidFill>
                   <a:srgbClr val="5C6552"/>
                 </a:solidFill>
-                <a:latin typeface="Karla"/>
+                <a:latin typeface="Calibri"/>
               </a:rPr>
               <a:t>Researchers counted how often students used a university gym, day by day.</a:t>
             </a:r>
@@ -10956,11 +10956,11 @@
               </a:spcAft>
             </a:pPr>
             <a:r>
-              <a:rPr sz="4400" b="1" i="0">
+              <a:rPr sz="4400" b="0" i="0">
                 <a:solidFill>
                   <a:srgbClr val="FFFDF7"/>
                 </a:solidFill>
-                <a:latin typeface="Libre Caslon Display"/>
+                <a:latin typeface="Georgia"/>
               </a:rPr>
               <a:t>47%</a:t>
             </a:r>
@@ -11002,7 +11002,7 @@
                 <a:solidFill>
                   <a:srgbClr val="B9DBE4"/>
                 </a:solidFill>
-                <a:latin typeface="Karla"/>
+                <a:latin typeface="Calibri"/>
               </a:rPr>
               <a:t>more visits</a:t>
             </a:r>
@@ -11021,7 +11021,7 @@
                 <a:solidFill>
                   <a:srgbClr val="B9DBE4"/>
                 </a:solidFill>
-                <a:latin typeface="Karla"/>
+                <a:latin typeface="Calibri"/>
               </a:rPr>
               <a:t>as a new term starts</a:t>
             </a:r>
@@ -11105,11 +11105,11 @@
               </a:spcAft>
             </a:pPr>
             <a:r>
-              <a:rPr sz="4400" b="1" i="0">
+              <a:rPr sz="4400" b="0" i="0">
                 <a:solidFill>
                   <a:srgbClr val="1F6577"/>
                 </a:solidFill>
-                <a:latin typeface="Libre Caslon Display"/>
+                <a:latin typeface="Georgia"/>
               </a:rPr>
               <a:t>33%</a:t>
             </a:r>
@@ -11151,7 +11151,7 @@
                 <a:solidFill>
                   <a:srgbClr val="5C6552"/>
                 </a:solidFill>
-                <a:latin typeface="Karla"/>
+                <a:latin typeface="Calibri"/>
               </a:rPr>
               <a:t>more visits</a:t>
             </a:r>
@@ -11170,7 +11170,7 @@
                 <a:solidFill>
                   <a:srgbClr val="5C6552"/>
                 </a:solidFill>
-                <a:latin typeface="Karla"/>
+                <a:latin typeface="Calibri"/>
               </a:rPr>
               <a:t>as a new week starts</a:t>
             </a:r>
@@ -11254,11 +11254,11 @@
               </a:spcAft>
             </a:pPr>
             <a:r>
-              <a:rPr sz="4400" b="1" i="0">
+              <a:rPr sz="4400" b="0" i="0">
                 <a:solidFill>
                   <a:srgbClr val="1F6577"/>
                 </a:solidFill>
-                <a:latin typeface="Libre Caslon Display"/>
+                <a:latin typeface="Georgia"/>
               </a:rPr>
               <a:t>12%</a:t>
             </a:r>
@@ -11300,7 +11300,7 @@
                 <a:solidFill>
                   <a:srgbClr val="5C6552"/>
                 </a:solidFill>
-                <a:latin typeface="Karla"/>
+                <a:latin typeface="Calibri"/>
               </a:rPr>
               <a:t>more visits</a:t>
             </a:r>
@@ -11319,7 +11319,7 @@
                 <a:solidFill>
                   <a:srgbClr val="5C6552"/>
                 </a:solidFill>
-                <a:latin typeface="Karla"/>
+                <a:latin typeface="Calibri"/>
               </a:rPr>
               <a:t>as a new year starts</a:t>
             </a:r>
@@ -11361,7 +11361,7 @@
                 <a:solidFill>
                   <a:srgbClr val="1F6577"/>
                 </a:solidFill>
-                <a:latin typeface="Karla"/>
+                <a:latin typeface="Calibri"/>
               </a:rPr>
               <a:t>So now is a good time to start. The hard part is keeping going.</a:t>
             </a:r>
@@ -11403,7 +11403,7 @@
                 <a:solidFill>
                   <a:srgbClr val="8B9179"/>
                 </a:solidFill>
-                <a:latin typeface="Karla"/>
+                <a:latin typeface="Calibri"/>
               </a:rPr>
               <a:t>Source: Dai, Milkman and Riis, 2014</a:t>
             </a:r>
@@ -11469,7 +11469,7 @@
                 <a:solidFill>
                   <a:srgbClr val="8B9179"/>
                 </a:solidFill>
-                <a:latin typeface="Karla"/>
+                <a:latin typeface="Calibri"/>
               </a:rPr>
               <a:t>The Pastoral Guide</a:t>
             </a:r>
@@ -11511,7 +11511,7 @@
                 <a:solidFill>
                   <a:srgbClr val="8B9179"/>
                 </a:solidFill>
-                <a:latin typeface="Karla"/>
+                <a:latin typeface="Calibri"/>
               </a:rPr>
               <a:t>4 / 17</a:t>
             </a:r>
@@ -11615,7 +11615,7 @@
                 <a:solidFill>
                   <a:srgbClr val="1F6577"/>
                 </a:solidFill>
-                <a:latin typeface="Karla"/>
+                <a:latin typeface="Calibri"/>
               </a:rPr>
               <a:t>WHAT THE RESEARCH FOUND</a:t>
             </a:r>
@@ -11653,11 +11653,11 @@
               </a:spcAft>
             </a:pPr>
             <a:r>
-              <a:rPr sz="2800" b="1" i="0">
+              <a:rPr sz="2800" b="0" i="0">
                 <a:solidFill>
                   <a:srgbClr val="2E3436"/>
                 </a:solidFill>
-                <a:latin typeface="Libre Caslon Display"/>
+                <a:latin typeface="Georgia"/>
               </a:rPr>
               <a:t>Aim towards something</a:t>
             </a:r>
@@ -11699,7 +11699,7 @@
                 <a:solidFill>
                   <a:srgbClr val="5C6552"/>
                 </a:solidFill>
-                <a:latin typeface="Karla"/>
+                <a:latin typeface="Calibri"/>
               </a:rPr>
               <a:t>In Sweden, over 1,000 people made a New Year’s resolution. A year later, researchers asked how they were getting on.</a:t>
             </a:r>
@@ -11783,11 +11783,11 @@
               </a:spcAft>
             </a:pPr>
             <a:r>
-              <a:rPr sz="4400" b="1" i="0">
+              <a:rPr sz="4400" b="0" i="0">
                 <a:solidFill>
                   <a:srgbClr val="FFFDF7"/>
                 </a:solidFill>
-                <a:latin typeface="Libre Caslon Display"/>
+                <a:latin typeface="Georgia"/>
               </a:rPr>
               <a:t>59%</a:t>
             </a:r>
@@ -11829,7 +11829,7 @@
                 <a:solidFill>
                   <a:srgbClr val="B9DBE4"/>
                 </a:solidFill>
-                <a:latin typeface="Karla"/>
+                <a:latin typeface="Calibri"/>
               </a:rPr>
               <a:t>kept a goal to start or do more of something</a:t>
             </a:r>
@@ -11913,11 +11913,11 @@
               </a:spcAft>
             </a:pPr>
             <a:r>
-              <a:rPr sz="4400" b="1" i="0">
+              <a:rPr sz="4400" b="0" i="0">
                 <a:solidFill>
                   <a:srgbClr val="1F6577"/>
                 </a:solidFill>
-                <a:latin typeface="Libre Caslon Display"/>
+                <a:latin typeface="Georgia"/>
               </a:rPr>
               <a:t>47%</a:t>
             </a:r>
@@ -11959,7 +11959,7 @@
                 <a:solidFill>
                   <a:srgbClr val="5C6552"/>
                 </a:solidFill>
-                <a:latin typeface="Karla"/>
+                <a:latin typeface="Calibri"/>
               </a:rPr>
               <a:t>kept a goal to stop or avoid something</a:t>
             </a:r>
@@ -12001,7 +12001,7 @@
                 <a:solidFill>
                   <a:srgbClr val="1F6577"/>
                 </a:solidFill>
-                <a:latin typeface="Karla"/>
+                <a:latin typeface="Calibri"/>
               </a:rPr>
               <a:t>Not “stop wasting time on my phone”, but “read for ten minutes before bed”.</a:t>
             </a:r>
@@ -12043,7 +12043,7 @@
                 <a:solidFill>
                   <a:srgbClr val="8B9179"/>
                 </a:solidFill>
-                <a:latin typeface="Karla"/>
+                <a:latin typeface="Calibri"/>
               </a:rPr>
               <a:t>Source: Oscarsson and colleagues, 2020</a:t>
             </a:r>
@@ -12109,7 +12109,7 @@
                 <a:solidFill>
                   <a:srgbClr val="8B9179"/>
                 </a:solidFill>
-                <a:latin typeface="Karla"/>
+                <a:latin typeface="Calibri"/>
               </a:rPr>
               <a:t>The Pastoral Guide</a:t>
             </a:r>
@@ -12151,7 +12151,7 @@
                 <a:solidFill>
                   <a:srgbClr val="8B9179"/>
                 </a:solidFill>
-                <a:latin typeface="Karla"/>
+                <a:latin typeface="Calibri"/>
               </a:rPr>
               <a:t>5 / 17</a:t>
             </a:r>
@@ -12255,7 +12255,7 @@
                 <a:solidFill>
                   <a:srgbClr val="1F6577"/>
                 </a:solidFill>
-                <a:latin typeface="Karla"/>
+                <a:latin typeface="Calibri"/>
               </a:rPr>
               <a:t>WHAT THE RESEARCH FOUND</a:t>
             </a:r>
@@ -12293,11 +12293,11 @@
               </a:spcAft>
             </a:pPr>
             <a:r>
-              <a:rPr sz="2800" b="1" i="0">
+              <a:rPr sz="2800" b="0" i="0">
                 <a:solidFill>
                   <a:srgbClr val="2E3436"/>
                 </a:solidFill>
-                <a:latin typeface="Libre Caslon Display"/>
+                <a:latin typeface="Georgia"/>
               </a:rPr>
               <a:t>Plan for the hard moment</a:t>
             </a:r>
@@ -12427,7 +12427,7 @@
                 <a:solidFill>
                   <a:srgbClr val="FFFDF7"/>
                 </a:solidFill>
-                <a:latin typeface="Karla"/>
+                <a:latin typeface="Calibri"/>
               </a:rPr>
               <a:t>1</a:t>
             </a:r>
@@ -12465,11 +12465,11 @@
               </a:spcAft>
             </a:pPr>
             <a:r>
-              <a:rPr sz="1300" b="1" i="0">
+              <a:rPr sz="1300" b="0" i="0">
                 <a:solidFill>
                   <a:srgbClr val="1F6577"/>
                 </a:solidFill>
-                <a:latin typeface="Libre Caslon Display"/>
+                <a:latin typeface="Georgia"/>
               </a:rPr>
               <a:t>Some people made a plan that said: when this happens, I will do that.</a:t>
             </a:r>
@@ -12511,7 +12511,7 @@
                 <a:solidFill>
                   <a:srgbClr val="5C6552"/>
                 </a:solidFill>
-                <a:latin typeface="Karla"/>
+                <a:latin typeface="Calibri"/>
               </a:rPr>
               <a:t>It is called an if-then plan.</a:t>
             </a:r>
@@ -12641,7 +12641,7 @@
                 <a:solidFill>
                   <a:srgbClr val="FFFDF7"/>
                 </a:solidFill>
-                <a:latin typeface="Karla"/>
+                <a:latin typeface="Calibri"/>
               </a:rPr>
               <a:t>2</a:t>
             </a:r>
@@ -12679,11 +12679,11 @@
               </a:spcAft>
             </a:pPr>
             <a:r>
-              <a:rPr sz="1300" b="1" i="0">
+              <a:rPr sz="1300" b="0" i="0">
                 <a:solidFill>
                   <a:srgbClr val="1F6577"/>
                 </a:solidFill>
-                <a:latin typeface="Libre Caslon Display"/>
+                <a:latin typeface="Georgia"/>
               </a:rPr>
               <a:t>Across 94 studies, an if-then plan helped people reach their goals.</a:t>
             </a:r>
@@ -12725,7 +12725,7 @@
                 <a:solidFill>
                   <a:srgbClr val="5C6552"/>
                 </a:solidFill>
-                <a:latin typeface="Karla"/>
+                <a:latin typeface="Calibri"/>
               </a:rPr>
               <a:t>That is a big difference for something this simple.</a:t>
             </a:r>
@@ -12855,7 +12855,7 @@
                 <a:solidFill>
                   <a:srgbClr val="FFFDF7"/>
                 </a:solidFill>
-                <a:latin typeface="Karla"/>
+                <a:latin typeface="Calibri"/>
               </a:rPr>
               <a:t>3</a:t>
             </a:r>
@@ -12893,11 +12893,11 @@
               </a:spcAft>
             </a:pPr>
             <a:r>
-              <a:rPr sz="1300" b="1" i="0">
+              <a:rPr sz="1300" b="0" i="0">
                 <a:solidFill>
                   <a:srgbClr val="1F6577"/>
                 </a:solidFill>
-                <a:latin typeface="Libre Caslon Display"/>
+                <a:latin typeface="Georgia"/>
               </a:rPr>
               <a:t>The decision is already made before the hard moment comes.</a:t>
             </a:r>
@@ -12939,7 +12939,7 @@
                 <a:solidFill>
                   <a:srgbClr val="5C6552"/>
                 </a:solidFill>
-                <a:latin typeface="Karla"/>
+                <a:latin typeface="Calibri"/>
               </a:rPr>
               <a:t>So there is less to argue with yourself about.</a:t>
             </a:r>
@@ -12981,7 +12981,7 @@
                 <a:solidFill>
                   <a:srgbClr val="1F6577"/>
                 </a:solidFill>
-                <a:latin typeface="Karla"/>
+                <a:latin typeface="Calibri"/>
               </a:rPr>
               <a:t>Think about it: what usually gets in the way when you try to keep something up?</a:t>
             </a:r>
@@ -13023,7 +13023,7 @@
                 <a:solidFill>
                   <a:srgbClr val="8B9179"/>
                 </a:solidFill>
-                <a:latin typeface="Karla"/>
+                <a:latin typeface="Calibri"/>
               </a:rPr>
               <a:t>Source: Gollwitzer and Sheeran, 2006</a:t>
             </a:r>
@@ -13089,7 +13089,7 @@
                 <a:solidFill>
                   <a:srgbClr val="8B9179"/>
                 </a:solidFill>
-                <a:latin typeface="Karla"/>
+                <a:latin typeface="Calibri"/>
               </a:rPr>
               <a:t>The Pastoral Guide</a:t>
             </a:r>
@@ -13131,7 +13131,7 @@
                 <a:solidFill>
                   <a:srgbClr val="8B9179"/>
                 </a:solidFill>
-                <a:latin typeface="Karla"/>
+                <a:latin typeface="Calibri"/>
               </a:rPr>
               <a:t>6 / 17</a:t>
             </a:r>
@@ -13235,7 +13235,7 @@
                 <a:solidFill>
                   <a:srgbClr val="1F6577"/>
                 </a:solidFill>
-                <a:latin typeface="Karla"/>
+                <a:latin typeface="Calibri"/>
               </a:rPr>
               <a:t>WHAT THE RESEARCH FOUND</a:t>
             </a:r>
@@ -13273,11 +13273,11 @@
               </a:spcAft>
             </a:pPr>
             <a:r>
-              <a:rPr sz="2800" b="1" i="0">
+              <a:rPr sz="2800" b="0" i="0">
                 <a:solidFill>
                   <a:srgbClr val="2E3436"/>
                 </a:solidFill>
-                <a:latin typeface="Libre Caslon Display"/>
+                <a:latin typeface="Georgia"/>
               </a:rPr>
               <a:t>Missing a day doesn’t ruin it</a:t>
             </a:r>
@@ -13407,7 +13407,7 @@
                 <a:solidFill>
                   <a:srgbClr val="FFFDF7"/>
                 </a:solidFill>
-                <a:latin typeface="Karla"/>
+                <a:latin typeface="Calibri"/>
               </a:rPr>
               <a:t>1</a:t>
             </a:r>
@@ -13445,11 +13445,11 @@
               </a:spcAft>
             </a:pPr>
             <a:r>
-              <a:rPr sz="1300" b="1" i="0">
+              <a:rPr sz="1300" b="0" i="0">
                 <a:solidFill>
                   <a:srgbClr val="1F6577"/>
                 </a:solidFill>
-                <a:latin typeface="Libre Caslon Display"/>
+                <a:latin typeface="Georgia"/>
               </a:rPr>
               <a:t>96 people each picked one new habit, like fruit with lunch.</a:t>
             </a:r>
@@ -13491,7 +13491,7 @@
                 <a:solidFill>
                   <a:srgbClr val="5C6552"/>
                 </a:solidFill>
-                <a:latin typeface="Karla"/>
+                <a:latin typeface="Calibri"/>
               </a:rPr>
               <a:t>They recorded it every day for twelve weeks.</a:t>
             </a:r>
@@ -13621,7 +13621,7 @@
                 <a:solidFill>
                   <a:srgbClr val="FFFDF7"/>
                 </a:solidFill>
-                <a:latin typeface="Karla"/>
+                <a:latin typeface="Calibri"/>
               </a:rPr>
               <a:t>2</a:t>
             </a:r>
@@ -13659,11 +13659,11 @@
               </a:spcAft>
             </a:pPr>
             <a:r>
-              <a:rPr sz="1300" b="1" i="0">
+              <a:rPr sz="1300" b="0" i="0">
                 <a:solidFill>
                   <a:srgbClr val="1F6577"/>
                 </a:solidFill>
-                <a:latin typeface="Libre Caslon Display"/>
+                <a:latin typeface="Georgia"/>
               </a:rPr>
               <a:t>On average it took 66 days before the habit felt automatic.</a:t>
             </a:r>
@@ -13705,7 +13705,7 @@
                 <a:solidFill>
                   <a:srgbClr val="5C6552"/>
                 </a:solidFill>
-                <a:latin typeface="Karla"/>
+                <a:latin typeface="Calibri"/>
               </a:rPr>
               <a:t>For some people it was much quicker, and for some much slower.</a:t>
             </a:r>
@@ -13835,7 +13835,7 @@
                 <a:solidFill>
                   <a:srgbClr val="FFFDF7"/>
                 </a:solidFill>
-                <a:latin typeface="Karla"/>
+                <a:latin typeface="Calibri"/>
               </a:rPr>
               <a:t>3</a:t>
             </a:r>
@@ -13873,11 +13873,11 @@
               </a:spcAft>
             </a:pPr>
             <a:r>
-              <a:rPr sz="1300" b="1" i="0">
+              <a:rPr sz="1300" b="0" i="0">
                 <a:solidFill>
                   <a:srgbClr val="1F6577"/>
                 </a:solidFill>
-                <a:latin typeface="Libre Caslon Display"/>
+                <a:latin typeface="Georgia"/>
               </a:rPr>
               <a:t>Missing one day made very little difference.</a:t>
             </a:r>
@@ -13919,7 +13919,7 @@
                 <a:solidFill>
                   <a:srgbClr val="5C6552"/>
                 </a:solidFill>
-                <a:latin typeface="Karla"/>
+                <a:latin typeface="Calibri"/>
               </a:rPr>
               <a:t>What mattered was getting back to it the next time.</a:t>
             </a:r>
@@ -13961,7 +13961,7 @@
                 <a:solidFill>
                   <a:srgbClr val="1F6577"/>
                 </a:solidFill>
-                <a:latin typeface="Karla"/>
+                <a:latin typeface="Calibri"/>
               </a:rPr>
               <a:t>So a bad week is not the end. The week after counts more.</a:t>
             </a:r>
@@ -14003,7 +14003,7 @@
                 <a:solidFill>
                   <a:srgbClr val="8B9179"/>
                 </a:solidFill>
-                <a:latin typeface="Karla"/>
+                <a:latin typeface="Calibri"/>
               </a:rPr>
               <a:t>Source: Lally and colleagues, 2010</a:t>
             </a:r>
@@ -14069,7 +14069,7 @@
                 <a:solidFill>
                   <a:srgbClr val="8B9179"/>
                 </a:solidFill>
-                <a:latin typeface="Karla"/>
+                <a:latin typeface="Calibri"/>
               </a:rPr>
               <a:t>The Pastoral Guide</a:t>
             </a:r>
@@ -14111,7 +14111,7 @@
                 <a:solidFill>
                   <a:srgbClr val="8B9179"/>
                 </a:solidFill>
-                <a:latin typeface="Karla"/>
+                <a:latin typeface="Calibri"/>
               </a:rPr>
               <a:t>7 / 17</a:t>
             </a:r>
@@ -14215,7 +14215,7 @@
                 <a:solidFill>
                   <a:srgbClr val="1F6577"/>
                 </a:solidFill>
-                <a:latin typeface="Karla"/>
+                <a:latin typeface="Calibri"/>
               </a:rPr>
               <a:t>IN FORM TIME THIS WEEK</a:t>
             </a:r>
@@ -14253,11 +14253,11 @@
               </a:spcAft>
             </a:pPr>
             <a:r>
-              <a:rPr sz="3200" b="1" i="0">
+              <a:rPr sz="3200" b="0" i="0">
                 <a:solidFill>
                   <a:srgbClr val="2E3436"/>
                 </a:solidFill>
-                <a:latin typeface="Libre Caslon Display"/>
+                <a:latin typeface="Georgia"/>
               </a:rPr>
               <a:t>One value a day</a:t>
             </a:r>
@@ -14343,7 +14343,7 @@
                 <a:solidFill>
                   <a:srgbClr val="1F6577"/>
                 </a:solidFill>
-                <a:latin typeface="Karla"/>
+                <a:latin typeface="Calibri"/>
               </a:rPr>
               <a:t>MONDAY</a:t>
             </a:r>
@@ -14449,11 +14449,11 @@
               </a:spcAft>
             </a:pPr>
             <a:r>
-              <a:rPr sz="1350" b="1" i="0">
+              <a:rPr sz="1350" b="0" i="0">
                 <a:solidFill>
                   <a:srgbClr val="1F6577"/>
                 </a:solidFill>
-                <a:latin typeface="Libre Caslon Display"/>
+                <a:latin typeface="Georgia"/>
               </a:rPr>
               <a:t>Assembly</a:t>
             </a:r>
@@ -14539,7 +14539,7 @@
                 <a:solidFill>
                   <a:srgbClr val="1F6577"/>
                 </a:solidFill>
-                <a:latin typeface="Karla"/>
+                <a:latin typeface="Calibri"/>
               </a:rPr>
               <a:t>TUESDAY</a:t>
             </a:r>
@@ -14645,11 +14645,11 @@
               </a:spcAft>
             </a:pPr>
             <a:r>
-              <a:rPr sz="1350" b="1" i="0">
+              <a:rPr sz="1350" b="0" i="0">
                 <a:solidFill>
                   <a:srgbClr val="1F6577"/>
                 </a:solidFill>
-                <a:latin typeface="Libre Caslon Display"/>
+                <a:latin typeface="Georgia"/>
               </a:rPr>
               <a:t>Gratitude</a:t>
             </a:r>
@@ -14735,7 +14735,7 @@
                 <a:solidFill>
                   <a:srgbClr val="1F6577"/>
                 </a:solidFill>
-                <a:latin typeface="Karla"/>
+                <a:latin typeface="Calibri"/>
               </a:rPr>
               <a:t>WEDNESDAY</a:t>
             </a:r>
@@ -14841,11 +14841,11 @@
               </a:spcAft>
             </a:pPr>
             <a:r>
-              <a:rPr sz="1350" b="1" i="0">
+              <a:rPr sz="1350" b="0" i="0">
                 <a:solidFill>
                   <a:srgbClr val="1F6577"/>
                 </a:solidFill>
-                <a:latin typeface="Libre Caslon Display"/>
+                <a:latin typeface="Georgia"/>
               </a:rPr>
               <a:t>Ambition</a:t>
             </a:r>
@@ -14931,7 +14931,7 @@
                 <a:solidFill>
                   <a:srgbClr val="1F6577"/>
                 </a:solidFill>
-                <a:latin typeface="Karla"/>
+                <a:latin typeface="Calibri"/>
               </a:rPr>
               <a:t>THURSDAY</a:t>
             </a:r>
@@ -15037,11 +15037,11 @@
               </a:spcAft>
             </a:pPr>
             <a:r>
-              <a:rPr sz="1350" b="1" i="0">
+              <a:rPr sz="1350" b="0" i="0">
                 <a:solidFill>
                   <a:srgbClr val="1F6577"/>
                 </a:solidFill>
-                <a:latin typeface="Libre Caslon Display"/>
+                <a:latin typeface="Georgia"/>
               </a:rPr>
               <a:t>Resilience</a:t>
             </a:r>
@@ -15127,7 +15127,7 @@
                 <a:solidFill>
                   <a:srgbClr val="1F6577"/>
                 </a:solidFill>
-                <a:latin typeface="Karla"/>
+                <a:latin typeface="Calibri"/>
               </a:rPr>
               <a:t>FRIDAY</a:t>
             </a:r>
@@ -15233,11 +15233,11 @@
               </a:spcAft>
             </a:pPr>
             <a:r>
-              <a:rPr sz="1350" b="1" i="0">
+              <a:rPr sz="1350" b="0" i="0">
                 <a:solidFill>
                   <a:srgbClr val="1F6577"/>
                 </a:solidFill>
-                <a:latin typeface="Libre Caslon Display"/>
+                <a:latin typeface="Georgia"/>
               </a:rPr>
               <a:t>Courage</a:t>
             </a:r>
@@ -15279,7 +15279,7 @@
                 <a:solidFill>
                   <a:srgbClr val="1F6577"/>
                 </a:solidFill>
-                <a:latin typeface="Karla"/>
+                <a:latin typeface="Calibri"/>
               </a:rPr>
               <a:t>Five minutes each morning, and it all goes on one sheet.</a:t>
             </a:r>
@@ -15345,7 +15345,7 @@
                 <a:solidFill>
                   <a:srgbClr val="8B9179"/>
                 </a:solidFill>
-                <a:latin typeface="Karla"/>
+                <a:latin typeface="Calibri"/>
               </a:rPr>
               <a:t>The Pastoral Guide</a:t>
             </a:r>
@@ -15387,7 +15387,7 @@
                 <a:solidFill>
                   <a:srgbClr val="8B9179"/>
                 </a:solidFill>
-                <a:latin typeface="Karla"/>
+                <a:latin typeface="Calibri"/>
               </a:rPr>
               <a:t>8 / 17</a:t>
             </a:r>
@@ -15491,7 +15491,7 @@
                 <a:solidFill>
                   <a:srgbClr val="1F6577"/>
                 </a:solidFill>
-                <a:latin typeface="Karla"/>
+                <a:latin typeface="Calibri"/>
               </a:rPr>
               <a:t>YOUR SHEET</a:t>
             </a:r>
@@ -15529,11 +15529,11 @@
               </a:spcAft>
             </a:pPr>
             <a:r>
-              <a:rPr sz="3200" b="1" i="0">
+              <a:rPr sz="3200" b="0" i="0">
                 <a:solidFill>
                   <a:srgbClr val="2E3436"/>
                 </a:solidFill>
-                <a:latin typeface="Libre Caslon Display"/>
+                <a:latin typeface="Georgia"/>
               </a:rPr>
               <a:t>One sheet, until half term</a:t>
             </a:r>
@@ -15615,11 +15615,11 @@
               </a:spcAft>
             </a:pPr>
             <a:r>
-              <a:rPr sz="1350" b="1" i="0">
+              <a:rPr sz="1350" b="0" i="0">
                 <a:solidFill>
                   <a:srgbClr val="1F6577"/>
                 </a:solidFill>
-                <a:latin typeface="Libre Caslon Display"/>
+                <a:latin typeface="Georgia"/>
               </a:rPr>
               <a:t>The front: this week</a:t>
             </a:r>
@@ -15705,7 +15705,7 @@
                 <a:solidFill>
                   <a:srgbClr val="2E3436"/>
                 </a:solidFill>
-                <a:latin typeface="Karla"/>
+                <a:latin typeface="Calibri"/>
               </a:rPr>
               <a:t>Tuesday: three things that went well, and one person who helped.</a:t>
             </a:r>
@@ -15791,7 +15791,7 @@
                 <a:solidFill>
                   <a:srgbClr val="2E3436"/>
                 </a:solidFill>
-                <a:latin typeface="Karla"/>
+                <a:latin typeface="Calibri"/>
               </a:rPr>
               <a:t>Wednesday: one thing to get better at, made small.</a:t>
             </a:r>
@@ -15877,7 +15877,7 @@
                 <a:solidFill>
                   <a:srgbClr val="2E3436"/>
                 </a:solidFill>
-                <a:latin typeface="Karla"/>
+                <a:latin typeface="Calibri"/>
               </a:rPr>
               <a:t>Thursday: your first step, and a plan for when it gets hard.</a:t>
             </a:r>
@@ -15963,7 +15963,7 @@
                 <a:solidFill>
                   <a:srgbClr val="2E3436"/>
                 </a:solidFill>
-                <a:latin typeface="Karla"/>
+                <a:latin typeface="Calibri"/>
               </a:rPr>
               <a:t>Friday: take the first step.</a:t>
             </a:r>
@@ -16045,11 +16045,11 @@
               </a:spcAft>
             </a:pPr>
             <a:r>
-              <a:rPr sz="1350" b="1" i="0">
+              <a:rPr sz="1350" b="0" i="0">
                 <a:solidFill>
                   <a:srgbClr val="1F6577"/>
                 </a:solidFill>
-                <a:latin typeface="Libre Caslon Display"/>
+                <a:latin typeface="Georgia"/>
               </a:rPr>
               <a:t>The back: every Friday</a:t>
             </a:r>
@@ -16135,7 +16135,7 @@
                 <a:solidFill>
                   <a:srgbClr val="2E3436"/>
                 </a:solidFill>
-                <a:latin typeface="Karla"/>
+                <a:latin typeface="Calibri"/>
               </a:rPr>
               <a:t>Write one line: what you actually did that week.</a:t>
             </a:r>
@@ -16221,7 +16221,7 @@
                 <a:solidFill>
                   <a:srgbClr val="2E3436"/>
                 </a:solidFill>
-                <a:latin typeface="Karla"/>
+                <a:latin typeface="Calibri"/>
               </a:rPr>
               <a:t>A blank week is not a fail. Write what you will do next week instead.</a:t>
             </a:r>
@@ -16307,7 +16307,7 @@
                 <a:solidFill>
                   <a:srgbClr val="2E3436"/>
                 </a:solidFill>
-                <a:latin typeface="Karla"/>
+                <a:latin typeface="Calibri"/>
               </a:rPr>
               <a:t>At half term, look back at the whole sheet.</a:t>
             </a:r>
@@ -16373,7 +16373,7 @@
                 <a:solidFill>
                   <a:srgbClr val="8B9179"/>
                 </a:solidFill>
-                <a:latin typeface="Karla"/>
+                <a:latin typeface="Calibri"/>
               </a:rPr>
               <a:t>The Pastoral Guide</a:t>
             </a:r>
@@ -16415,7 +16415,7 @@
                 <a:solidFill>
                   <a:srgbClr val="8B9179"/>
                 </a:solidFill>
-                <a:latin typeface="Karla"/>
+                <a:latin typeface="Calibri"/>
               </a:rPr>
               <a:t>9 / 17</a:t>
             </a:r>
